--- a/decks/geog-gis/geog-gis_ch3_uses-of-gis.pptx
+++ b/decks/geog-gis/geog-gis_ch3_uses-of-gis.pptx
@@ -124,29 +124,29 @@
   <p:extLst>
     <p:ext uri="{521415D9-36F7-43E2-AB2F-B90AF26B5E84}">
       <p14:sectionLst xmlns:p14="http://schemas.microsoft.com/office/powerpoint/2010/main">
-        <p14:section name="Opening" id="{fe1a1ea9-863a-b567-5f35-948be898baa9}">
+        <p14:section name="Opening" id="{15e35b4c-dbea-ef54-4d70-d75e41f6f45b}">
           <p14:sldIdLst>
             <p14:sldId id="256"/>
           </p14:sldIdLst>
         </p14:section>
-        <p14:section name="Gate" id="{738c516d-05ae-20e8-17fe-f36ed049b547}">
+        <p14:section name="Gate" id="{9c0a1d71-1c1d-8fbb-c74c-49072daab173}">
           <p14:sldIdLst>
             <p14:sldId id="257"/>
             <p14:sldId id="258"/>
           </p14:sldIdLst>
         </p14:section>
-        <p14:section name="Pre-teach" id="{b550963c-5f3d-b3f8-45ca-612bdcdfb7f6}">
+        <p14:section name="Pre-teach" id="{79d9fa13-7de0-fae1-b749-2815421b7933}">
           <p14:sldIdLst>
             <p14:sldId id="259"/>
           </p14:sldIdLst>
         </p14:section>
-        <p14:section name="Read-along" id="{067118bb-9ed2-2613-06a4-ff3b5b4c0b9d}">
+        <p14:section name="Read-along" id="{ab9c5b45-e0fa-5812-912f-a7f31b8f7ade}">
           <p14:sldIdLst>
             <p14:sldId id="260"/>
             <p14:sldId id="261"/>
           </p14:sldIdLst>
         </p14:section>
-        <p14:section name="Teach" id="{50c4b989-d684-a6f6-e444-734c1e682020}">
+        <p14:section name="Teach" id="{aec2ed0c-5df5-20ac-4196-9a2109632248}">
           <p14:sldIdLst>
             <p14:sldId id="262"/>
             <p14:sldId id="263"/>
@@ -154,7 +154,7 @@
             <p14:sldId id="265"/>
           </p14:sldIdLst>
         </p14:section>
-        <p14:section name="Routes" id="{0dce7b13-e5d1-4e66-d202-f282438d22be}">
+        <p14:section name="Routes" id="{b72bf888-83ed-0616-32b6-b8bacfb794da}">
           <p14:sldIdLst>
             <p14:sldId id="266"/>
             <p14:sldId id="267"/>
@@ -162,12 +162,12 @@
             <p14:sldId id="269"/>
           </p14:sldIdLst>
         </p14:section>
-        <p14:section name="Close" id="{fc56d174-251e-e3a1-d042-0ae917a5e5f3}">
+        <p14:section name="Close" id="{07880639-f892-45ac-85e9-4010c89f4a3e}">
           <p14:sldIdLst>
             <p14:sldId id="270"/>
           </p14:sldIdLst>
         </p14:section>
-        <p14:section name="Answers" id="{f1cf6054-16c9-c60a-0e20-3825430d3e68}">
+        <p14:section name="Answers" id="{dadd7c58-28bd-efca-3278-38cdcad52a64}">
           <p14:sldIdLst>
             <p14:sldId id="271"/>
             <p14:sldId id="272"/>
